--- a/Entry_01_BWPD.pptx
+++ b/Entry_01_BWPD.pptx
@@ -1625,7 +1625,7 @@
                 <a:ea typeface="Courier New" pitchFamily="34" charset="-122"/>
                 <a:cs typeface="Courier New" pitchFamily="34" charset="-120"/>
               </a:rPr>
-              <a:t>DATE OF PRODUCTION: UNKNOWN</a:t>
+              <a:t>DATE OF PRODUCTION: 8/2/20XX</a:t>
             </a:r>
             <a:endParaRPr lang="en-US" sz="1000" dirty="0"/>
           </a:p>
